--- a/Figures/Figure4.pptx
+++ b/Figures/Figure4.pptx
@@ -2,7 +2,7 @@
 <file path=ppt/presentation.xml><?xml version="1.0" encoding="utf-8"?>
 <p:presentation xmlns:a="http://schemas.openxmlformats.org/drawingml/2006/main" xmlns:r="http://schemas.openxmlformats.org/officeDocument/2006/relationships" xmlns:p="http://schemas.openxmlformats.org/presentationml/2006/main" saveSubsetFonts="1" autoCompressPictures="0">
   <p:sldMasterIdLst>
-    <p:sldMasterId id="2147483684" r:id="rId1"/>
+    <p:sldMasterId id="2147483696" r:id="rId1"/>
   </p:sldMasterIdLst>
   <p:notesMasterIdLst>
     <p:notesMasterId r:id="rId3"/>
@@ -10,7 +10,7 @@
   <p:sldIdLst>
     <p:sldId id="256" r:id="rId2"/>
   </p:sldIdLst>
-  <p:sldSz cx="4114800" cy="2193925"/>
+  <p:sldSz cx="4114800" cy="2422525"/>
   <p:notesSz cx="6858000" cy="9144000"/>
   <p:defaultTextStyle>
     <a:defPPr>
@@ -107,6 +107,11 @@
       </a:defRPr>
     </a:lvl9pPr>
   </p:defaultTextStyle>
+  <p:extLst>
+    <p:ext uri="{EFAFB233-063F-42B5-8137-9DF3F51BA10A}">
+      <p15:sldGuideLst xmlns:p15="http://schemas.microsoft.com/office/powerpoint/2012/main"/>
+    </p:ext>
+  </p:extLst>
 </p:presentation>
 </file>
 
@@ -192,7 +197,7 @@
           <a:p>
             <a:fld id="{19A305DD-2C40-374F-AD67-CF1F157C186A}" type="datetimeFigureOut">
               <a:rPr lang="en-US" smtClean="0"/>
-              <a:t>8/13/26</a:t>
+              <a:t>9/3/26</a:t>
             </a:fld>
             <a:endParaRPr lang="en-US"/>
           </a:p>
@@ -210,8 +215,8 @@
         </p:nvSpPr>
         <p:spPr>
           <a:xfrm>
-            <a:off x="534988" y="1143000"/>
-            <a:ext cx="5788025" cy="3086100"/>
+            <a:off x="808038" y="1143000"/>
+            <a:ext cx="5241925" cy="3086100"/>
           </a:xfrm>
           <a:prstGeom prst="rect">
             <a:avLst/>
@@ -488,8 +493,8 @@
         </p:nvSpPr>
         <p:spPr>
           <a:xfrm>
-            <a:off x="534988" y="1143000"/>
-            <a:ext cx="5788025" cy="3086100"/>
+            <a:off x="808038" y="1143000"/>
+            <a:ext cx="5241925" cy="3086100"/>
           </a:xfrm>
         </p:spPr>
       </p:sp>
@@ -577,15 +582,15 @@
         </p:nvSpPr>
         <p:spPr>
           <a:xfrm>
-            <a:off x="514350" y="359052"/>
-            <a:ext cx="3086100" cy="763811"/>
+            <a:off x="514350" y="396464"/>
+            <a:ext cx="3086100" cy="843398"/>
           </a:xfrm>
         </p:spPr>
         <p:txBody>
           <a:bodyPr anchor="b"/>
           <a:lstStyle>
             <a:lvl1pPr algn="ctr">
-              <a:defRPr sz="1919"/>
+              <a:defRPr sz="2025"/>
             </a:lvl1pPr>
           </a:lstStyle>
           <a:p>
@@ -609,8 +614,8 @@
         </p:nvSpPr>
         <p:spPr>
           <a:xfrm>
-            <a:off x="514350" y="1152318"/>
-            <a:ext cx="3086100" cy="529691"/>
+            <a:off x="514350" y="1272386"/>
+            <a:ext cx="3086100" cy="584883"/>
           </a:xfrm>
         </p:spPr>
         <p:txBody>
@@ -618,39 +623,39 @@
           <a:lstStyle>
             <a:lvl1pPr marL="0" indent="0" algn="ctr">
               <a:buNone/>
-              <a:defRPr sz="768"/>
+              <a:defRPr sz="810"/>
             </a:lvl1pPr>
-            <a:lvl2pPr marL="146258" indent="0" algn="ctr">
-              <a:buNone/>
-              <a:defRPr sz="640"/>
+            <a:lvl2pPr marL="154305" indent="0" algn="ctr">
+              <a:buNone/>
+              <a:defRPr sz="675"/>
             </a:lvl2pPr>
-            <a:lvl3pPr marL="292517" indent="0" algn="ctr">
-              <a:buNone/>
-              <a:defRPr sz="576"/>
+            <a:lvl3pPr marL="308610" indent="0" algn="ctr">
+              <a:buNone/>
+              <a:defRPr sz="608"/>
             </a:lvl3pPr>
-            <a:lvl4pPr marL="438775" indent="0" algn="ctr">
-              <a:buNone/>
-              <a:defRPr sz="512"/>
+            <a:lvl4pPr marL="462915" indent="0" algn="ctr">
+              <a:buNone/>
+              <a:defRPr sz="540"/>
             </a:lvl4pPr>
-            <a:lvl5pPr marL="585033" indent="0" algn="ctr">
-              <a:buNone/>
-              <a:defRPr sz="512"/>
+            <a:lvl5pPr marL="617220" indent="0" algn="ctr">
+              <a:buNone/>
+              <a:defRPr sz="540"/>
             </a:lvl5pPr>
-            <a:lvl6pPr marL="731291" indent="0" algn="ctr">
-              <a:buNone/>
-              <a:defRPr sz="512"/>
+            <a:lvl6pPr marL="771525" indent="0" algn="ctr">
+              <a:buNone/>
+              <a:defRPr sz="540"/>
             </a:lvl6pPr>
-            <a:lvl7pPr marL="877550" indent="0" algn="ctr">
-              <a:buNone/>
-              <a:defRPr sz="512"/>
+            <a:lvl7pPr marL="925830" indent="0" algn="ctr">
+              <a:buNone/>
+              <a:defRPr sz="540"/>
             </a:lvl7pPr>
-            <a:lvl8pPr marL="1023808" indent="0" algn="ctr">
-              <a:buNone/>
-              <a:defRPr sz="512"/>
+            <a:lvl8pPr marL="1080135" indent="0" algn="ctr">
+              <a:buNone/>
+              <a:defRPr sz="540"/>
             </a:lvl8pPr>
-            <a:lvl9pPr marL="1170066" indent="0" algn="ctr">
-              <a:buNone/>
-              <a:defRPr sz="512"/>
+            <a:lvl9pPr marL="1234440" indent="0" algn="ctr">
+              <a:buNone/>
+              <a:defRPr sz="540"/>
             </a:lvl9pPr>
           </a:lstStyle>
           <a:p>
@@ -679,7 +684,7 @@
           <a:p>
             <a:fld id="{A2725604-C4EE-BD48-B02F-72FA683510B1}" type="datetimeFigureOut">
               <a:rPr lang="en-US" smtClean="0"/>
-              <a:t>8/13/26</a:t>
+              <a:t>9/3/26</a:t>
             </a:fld>
             <a:endParaRPr lang="en-US"/>
           </a:p>
@@ -730,7 +735,7 @@
     </p:spTree>
     <p:extLst>
       <p:ext uri="{BB962C8B-B14F-4D97-AF65-F5344CB8AC3E}">
-        <p14:creationId xmlns:p14="http://schemas.microsoft.com/office/powerpoint/2010/main" val="3911153867"/>
+        <p14:creationId xmlns:p14="http://schemas.microsoft.com/office/powerpoint/2010/main" val="3263937498"/>
       </p:ext>
     </p:extLst>
   </p:cSld>
@@ -849,7 +854,7 @@
           <a:p>
             <a:fld id="{A2725604-C4EE-BD48-B02F-72FA683510B1}" type="datetimeFigureOut">
               <a:rPr lang="en-US" smtClean="0"/>
-              <a:t>8/13/26</a:t>
+              <a:t>9/3/26</a:t>
             </a:fld>
             <a:endParaRPr lang="en-US"/>
           </a:p>
@@ -900,7 +905,7 @@
     </p:spTree>
     <p:extLst>
       <p:ext uri="{BB962C8B-B14F-4D97-AF65-F5344CB8AC3E}">
-        <p14:creationId xmlns:p14="http://schemas.microsoft.com/office/powerpoint/2010/main" val="2713480816"/>
+        <p14:creationId xmlns:p14="http://schemas.microsoft.com/office/powerpoint/2010/main" val="3776651013"/>
       </p:ext>
     </p:extLst>
   </p:cSld>
@@ -939,8 +944,8 @@
         </p:nvSpPr>
         <p:spPr>
           <a:xfrm>
-            <a:off x="2944654" y="116806"/>
-            <a:ext cx="887254" cy="1859250"/>
+            <a:off x="2944654" y="128977"/>
+            <a:ext cx="887254" cy="2052978"/>
           </a:xfrm>
         </p:spPr>
         <p:txBody>
@@ -967,8 +972,8 @@
         </p:nvSpPr>
         <p:spPr>
           <a:xfrm>
-            <a:off x="282893" y="116806"/>
-            <a:ext cx="2610326" cy="1859250"/>
+            <a:off x="282893" y="128977"/>
+            <a:ext cx="2610326" cy="2052978"/>
           </a:xfrm>
         </p:spPr>
         <p:txBody>
@@ -1029,7 +1034,7 @@
           <a:p>
             <a:fld id="{A2725604-C4EE-BD48-B02F-72FA683510B1}" type="datetimeFigureOut">
               <a:rPr lang="en-US" smtClean="0"/>
-              <a:t>8/13/26</a:t>
+              <a:t>9/3/26</a:t>
             </a:fld>
             <a:endParaRPr lang="en-US"/>
           </a:p>
@@ -1080,7 +1085,7 @@
     </p:spTree>
     <p:extLst>
       <p:ext uri="{BB962C8B-B14F-4D97-AF65-F5344CB8AC3E}">
-        <p14:creationId xmlns:p14="http://schemas.microsoft.com/office/powerpoint/2010/main" val="3277935876"/>
+        <p14:creationId xmlns:p14="http://schemas.microsoft.com/office/powerpoint/2010/main" val="3499959388"/>
       </p:ext>
     </p:extLst>
   </p:cSld>
@@ -1199,7 +1204,7 @@
           <a:p>
             <a:fld id="{A2725604-C4EE-BD48-B02F-72FA683510B1}" type="datetimeFigureOut">
               <a:rPr lang="en-US" smtClean="0"/>
-              <a:t>8/13/26</a:t>
+              <a:t>9/3/26</a:t>
             </a:fld>
             <a:endParaRPr lang="en-US"/>
           </a:p>
@@ -1250,7 +1255,7 @@
     </p:spTree>
     <p:extLst>
       <p:ext uri="{BB962C8B-B14F-4D97-AF65-F5344CB8AC3E}">
-        <p14:creationId xmlns:p14="http://schemas.microsoft.com/office/powerpoint/2010/main" val="289205497"/>
+        <p14:creationId xmlns:p14="http://schemas.microsoft.com/office/powerpoint/2010/main" val="672175949"/>
       </p:ext>
     </p:extLst>
   </p:cSld>
@@ -1289,15 +1294,15 @@
         </p:nvSpPr>
         <p:spPr>
           <a:xfrm>
-            <a:off x="280749" y="546958"/>
-            <a:ext cx="3549015" cy="912612"/>
+            <a:off x="280749" y="603949"/>
+            <a:ext cx="3549015" cy="1007703"/>
           </a:xfrm>
         </p:spPr>
         <p:txBody>
           <a:bodyPr anchor="b"/>
           <a:lstStyle>
             <a:lvl1pPr>
-              <a:defRPr sz="1919"/>
+              <a:defRPr sz="2025"/>
             </a:lvl1pPr>
           </a:lstStyle>
           <a:p>
@@ -1321,8 +1326,8 @@
         </p:nvSpPr>
         <p:spPr>
           <a:xfrm>
-            <a:off x="280749" y="1468203"/>
-            <a:ext cx="3549015" cy="479921"/>
+            <a:off x="280749" y="1621186"/>
+            <a:ext cx="3549015" cy="529927"/>
           </a:xfrm>
         </p:spPr>
         <p:txBody>
@@ -1330,7 +1335,7 @@
           <a:lstStyle>
             <a:lvl1pPr marL="0" indent="0">
               <a:buNone/>
-              <a:defRPr sz="768">
+              <a:defRPr sz="810">
                 <a:solidFill>
                   <a:schemeClr val="tx1">
                     <a:tint val="82000"/>
@@ -1338,9 +1343,9 @@
                 </a:solidFill>
               </a:defRPr>
             </a:lvl1pPr>
-            <a:lvl2pPr marL="146258" indent="0">
-              <a:buNone/>
-              <a:defRPr sz="640">
+            <a:lvl2pPr marL="154305" indent="0">
+              <a:buNone/>
+              <a:defRPr sz="675">
                 <a:solidFill>
                   <a:schemeClr val="tx1">
                     <a:tint val="82000"/>
@@ -1348,9 +1353,9 @@
                 </a:solidFill>
               </a:defRPr>
             </a:lvl2pPr>
-            <a:lvl3pPr marL="292517" indent="0">
-              <a:buNone/>
-              <a:defRPr sz="576">
+            <a:lvl3pPr marL="308610" indent="0">
+              <a:buNone/>
+              <a:defRPr sz="608">
                 <a:solidFill>
                   <a:schemeClr val="tx1">
                     <a:tint val="82000"/>
@@ -1358,9 +1363,9 @@
                 </a:solidFill>
               </a:defRPr>
             </a:lvl3pPr>
-            <a:lvl4pPr marL="438775" indent="0">
-              <a:buNone/>
-              <a:defRPr sz="512">
+            <a:lvl4pPr marL="462915" indent="0">
+              <a:buNone/>
+              <a:defRPr sz="540">
                 <a:solidFill>
                   <a:schemeClr val="tx1">
                     <a:tint val="82000"/>
@@ -1368,9 +1373,9 @@
                 </a:solidFill>
               </a:defRPr>
             </a:lvl4pPr>
-            <a:lvl5pPr marL="585033" indent="0">
-              <a:buNone/>
-              <a:defRPr sz="512">
+            <a:lvl5pPr marL="617220" indent="0">
+              <a:buNone/>
+              <a:defRPr sz="540">
                 <a:solidFill>
                   <a:schemeClr val="tx1">
                     <a:tint val="82000"/>
@@ -1378,9 +1383,9 @@
                 </a:solidFill>
               </a:defRPr>
             </a:lvl5pPr>
-            <a:lvl6pPr marL="731291" indent="0">
-              <a:buNone/>
-              <a:defRPr sz="512">
+            <a:lvl6pPr marL="771525" indent="0">
+              <a:buNone/>
+              <a:defRPr sz="540">
                 <a:solidFill>
                   <a:schemeClr val="tx1">
                     <a:tint val="82000"/>
@@ -1388,9 +1393,9 @@
                 </a:solidFill>
               </a:defRPr>
             </a:lvl6pPr>
-            <a:lvl7pPr marL="877550" indent="0">
-              <a:buNone/>
-              <a:defRPr sz="512">
+            <a:lvl7pPr marL="925830" indent="0">
+              <a:buNone/>
+              <a:defRPr sz="540">
                 <a:solidFill>
                   <a:schemeClr val="tx1">
                     <a:tint val="82000"/>
@@ -1398,9 +1403,9 @@
                 </a:solidFill>
               </a:defRPr>
             </a:lvl7pPr>
-            <a:lvl8pPr marL="1023808" indent="0">
-              <a:buNone/>
-              <a:defRPr sz="512">
+            <a:lvl8pPr marL="1080135" indent="0">
+              <a:buNone/>
+              <a:defRPr sz="540">
                 <a:solidFill>
                   <a:schemeClr val="tx1">
                     <a:tint val="82000"/>
@@ -1408,9 +1413,9 @@
                 </a:solidFill>
               </a:defRPr>
             </a:lvl8pPr>
-            <a:lvl9pPr marL="1170066" indent="0">
-              <a:buNone/>
-              <a:defRPr sz="512">
+            <a:lvl9pPr marL="1234440" indent="0">
+              <a:buNone/>
+              <a:defRPr sz="540">
                 <a:solidFill>
                   <a:schemeClr val="tx1">
                     <a:tint val="82000"/>
@@ -1445,7 +1450,7 @@
           <a:p>
             <a:fld id="{A2725604-C4EE-BD48-B02F-72FA683510B1}" type="datetimeFigureOut">
               <a:rPr lang="en-US" smtClean="0"/>
-              <a:t>8/13/26</a:t>
+              <a:t>9/3/26</a:t>
             </a:fld>
             <a:endParaRPr lang="en-US"/>
           </a:p>
@@ -1496,7 +1501,7 @@
     </p:spTree>
     <p:extLst>
       <p:ext uri="{BB962C8B-B14F-4D97-AF65-F5344CB8AC3E}">
-        <p14:creationId xmlns:p14="http://schemas.microsoft.com/office/powerpoint/2010/main" val="2256195063"/>
+        <p14:creationId xmlns:p14="http://schemas.microsoft.com/office/powerpoint/2010/main" val="3281007041"/>
       </p:ext>
     </p:extLst>
   </p:cSld>
@@ -1558,8 +1563,8 @@
         </p:nvSpPr>
         <p:spPr>
           <a:xfrm>
-            <a:off x="282893" y="584031"/>
-            <a:ext cx="1748790" cy="1392025"/>
+            <a:off x="282893" y="644885"/>
+            <a:ext cx="1748790" cy="1537070"/>
           </a:xfrm>
         </p:spPr>
         <p:txBody>
@@ -1615,8 +1620,8 @@
         </p:nvSpPr>
         <p:spPr>
           <a:xfrm>
-            <a:off x="2083118" y="584031"/>
-            <a:ext cx="1748790" cy="1392025"/>
+            <a:off x="2083118" y="644885"/>
+            <a:ext cx="1748790" cy="1537070"/>
           </a:xfrm>
         </p:spPr>
         <p:txBody>
@@ -1677,7 +1682,7 @@
           <a:p>
             <a:fld id="{A2725604-C4EE-BD48-B02F-72FA683510B1}" type="datetimeFigureOut">
               <a:rPr lang="en-US" smtClean="0"/>
-              <a:t>8/13/26</a:t>
+              <a:t>9/3/26</a:t>
             </a:fld>
             <a:endParaRPr lang="en-US"/>
           </a:p>
@@ -1728,7 +1733,7 @@
     </p:spTree>
     <p:extLst>
       <p:ext uri="{BB962C8B-B14F-4D97-AF65-F5344CB8AC3E}">
-        <p14:creationId xmlns:p14="http://schemas.microsoft.com/office/powerpoint/2010/main" val="2621195828"/>
+        <p14:creationId xmlns:p14="http://schemas.microsoft.com/office/powerpoint/2010/main" val="1035112404"/>
       </p:ext>
     </p:extLst>
   </p:cSld>
@@ -1767,8 +1772,8 @@
         </p:nvSpPr>
         <p:spPr>
           <a:xfrm>
-            <a:off x="283428" y="116807"/>
-            <a:ext cx="3549015" cy="424057"/>
+            <a:off x="283428" y="128977"/>
+            <a:ext cx="3549015" cy="468243"/>
           </a:xfrm>
         </p:spPr>
         <p:txBody>
@@ -1795,8 +1800,8 @@
         </p:nvSpPr>
         <p:spPr>
           <a:xfrm>
-            <a:off x="283429" y="537816"/>
-            <a:ext cx="1740753" cy="263576"/>
+            <a:off x="283429" y="593855"/>
+            <a:ext cx="1740753" cy="291039"/>
           </a:xfrm>
         </p:spPr>
         <p:txBody>
@@ -1804,39 +1809,39 @@
           <a:lstStyle>
             <a:lvl1pPr marL="0" indent="0">
               <a:buNone/>
-              <a:defRPr sz="768" b="1"/>
+              <a:defRPr sz="810" b="1"/>
             </a:lvl1pPr>
-            <a:lvl2pPr marL="146258" indent="0">
-              <a:buNone/>
-              <a:defRPr sz="640" b="1"/>
+            <a:lvl2pPr marL="154305" indent="0">
+              <a:buNone/>
+              <a:defRPr sz="675" b="1"/>
             </a:lvl2pPr>
-            <a:lvl3pPr marL="292517" indent="0">
-              <a:buNone/>
-              <a:defRPr sz="576" b="1"/>
+            <a:lvl3pPr marL="308610" indent="0">
+              <a:buNone/>
+              <a:defRPr sz="608" b="1"/>
             </a:lvl3pPr>
-            <a:lvl4pPr marL="438775" indent="0">
-              <a:buNone/>
-              <a:defRPr sz="512" b="1"/>
+            <a:lvl4pPr marL="462915" indent="0">
+              <a:buNone/>
+              <a:defRPr sz="540" b="1"/>
             </a:lvl4pPr>
-            <a:lvl5pPr marL="585033" indent="0">
-              <a:buNone/>
-              <a:defRPr sz="512" b="1"/>
+            <a:lvl5pPr marL="617220" indent="0">
+              <a:buNone/>
+              <a:defRPr sz="540" b="1"/>
             </a:lvl5pPr>
-            <a:lvl6pPr marL="731291" indent="0">
-              <a:buNone/>
-              <a:defRPr sz="512" b="1"/>
+            <a:lvl6pPr marL="771525" indent="0">
+              <a:buNone/>
+              <a:defRPr sz="540" b="1"/>
             </a:lvl6pPr>
-            <a:lvl7pPr marL="877550" indent="0">
-              <a:buNone/>
-              <a:defRPr sz="512" b="1"/>
+            <a:lvl7pPr marL="925830" indent="0">
+              <a:buNone/>
+              <a:defRPr sz="540" b="1"/>
             </a:lvl7pPr>
-            <a:lvl8pPr marL="1023808" indent="0">
-              <a:buNone/>
-              <a:defRPr sz="512" b="1"/>
+            <a:lvl8pPr marL="1080135" indent="0">
+              <a:buNone/>
+              <a:defRPr sz="540" b="1"/>
             </a:lvl8pPr>
-            <a:lvl9pPr marL="1170066" indent="0">
-              <a:buNone/>
-              <a:defRPr sz="512" b="1"/>
+            <a:lvl9pPr marL="1234440" indent="0">
+              <a:buNone/>
+              <a:defRPr sz="540" b="1"/>
             </a:lvl9pPr>
           </a:lstStyle>
           <a:p>
@@ -1860,8 +1865,8 @@
         </p:nvSpPr>
         <p:spPr>
           <a:xfrm>
-            <a:off x="283429" y="801392"/>
-            <a:ext cx="1740753" cy="1178727"/>
+            <a:off x="283429" y="884894"/>
+            <a:ext cx="1740753" cy="1301547"/>
           </a:xfrm>
         </p:spPr>
         <p:txBody>
@@ -1917,8 +1922,8 @@
         </p:nvSpPr>
         <p:spPr>
           <a:xfrm>
-            <a:off x="2083117" y="537816"/>
-            <a:ext cx="1749326" cy="263576"/>
+            <a:off x="2083117" y="593855"/>
+            <a:ext cx="1749326" cy="291039"/>
           </a:xfrm>
         </p:spPr>
         <p:txBody>
@@ -1926,39 +1931,39 @@
           <a:lstStyle>
             <a:lvl1pPr marL="0" indent="0">
               <a:buNone/>
-              <a:defRPr sz="768" b="1"/>
+              <a:defRPr sz="810" b="1"/>
             </a:lvl1pPr>
-            <a:lvl2pPr marL="146258" indent="0">
-              <a:buNone/>
-              <a:defRPr sz="640" b="1"/>
+            <a:lvl2pPr marL="154305" indent="0">
+              <a:buNone/>
+              <a:defRPr sz="675" b="1"/>
             </a:lvl2pPr>
-            <a:lvl3pPr marL="292517" indent="0">
-              <a:buNone/>
-              <a:defRPr sz="576" b="1"/>
+            <a:lvl3pPr marL="308610" indent="0">
+              <a:buNone/>
+              <a:defRPr sz="608" b="1"/>
             </a:lvl3pPr>
-            <a:lvl4pPr marL="438775" indent="0">
-              <a:buNone/>
-              <a:defRPr sz="512" b="1"/>
+            <a:lvl4pPr marL="462915" indent="0">
+              <a:buNone/>
+              <a:defRPr sz="540" b="1"/>
             </a:lvl4pPr>
-            <a:lvl5pPr marL="585033" indent="0">
-              <a:buNone/>
-              <a:defRPr sz="512" b="1"/>
+            <a:lvl5pPr marL="617220" indent="0">
+              <a:buNone/>
+              <a:defRPr sz="540" b="1"/>
             </a:lvl5pPr>
-            <a:lvl6pPr marL="731291" indent="0">
-              <a:buNone/>
-              <a:defRPr sz="512" b="1"/>
+            <a:lvl6pPr marL="771525" indent="0">
+              <a:buNone/>
+              <a:defRPr sz="540" b="1"/>
             </a:lvl6pPr>
-            <a:lvl7pPr marL="877550" indent="0">
-              <a:buNone/>
-              <a:defRPr sz="512" b="1"/>
+            <a:lvl7pPr marL="925830" indent="0">
+              <a:buNone/>
+              <a:defRPr sz="540" b="1"/>
             </a:lvl7pPr>
-            <a:lvl8pPr marL="1023808" indent="0">
-              <a:buNone/>
-              <a:defRPr sz="512" b="1"/>
+            <a:lvl8pPr marL="1080135" indent="0">
+              <a:buNone/>
+              <a:defRPr sz="540" b="1"/>
             </a:lvl8pPr>
-            <a:lvl9pPr marL="1170066" indent="0">
-              <a:buNone/>
-              <a:defRPr sz="512" b="1"/>
+            <a:lvl9pPr marL="1234440" indent="0">
+              <a:buNone/>
+              <a:defRPr sz="540" b="1"/>
             </a:lvl9pPr>
           </a:lstStyle>
           <a:p>
@@ -1982,8 +1987,8 @@
         </p:nvSpPr>
         <p:spPr>
           <a:xfrm>
-            <a:off x="2083117" y="801392"/>
-            <a:ext cx="1749326" cy="1178727"/>
+            <a:off x="2083117" y="884894"/>
+            <a:ext cx="1749326" cy="1301547"/>
           </a:xfrm>
         </p:spPr>
         <p:txBody>
@@ -2044,7 +2049,7 @@
           <a:p>
             <a:fld id="{A2725604-C4EE-BD48-B02F-72FA683510B1}" type="datetimeFigureOut">
               <a:rPr lang="en-US" smtClean="0"/>
-              <a:t>8/13/26</a:t>
+              <a:t>9/3/26</a:t>
             </a:fld>
             <a:endParaRPr lang="en-US"/>
           </a:p>
@@ -2095,7 +2100,7 @@
     </p:spTree>
     <p:extLst>
       <p:ext uri="{BB962C8B-B14F-4D97-AF65-F5344CB8AC3E}">
-        <p14:creationId xmlns:p14="http://schemas.microsoft.com/office/powerpoint/2010/main" val="3548327603"/>
+        <p14:creationId xmlns:p14="http://schemas.microsoft.com/office/powerpoint/2010/main" val="1207467359"/>
       </p:ext>
     </p:extLst>
   </p:cSld>
@@ -2162,7 +2167,7 @@
           <a:p>
             <a:fld id="{A2725604-C4EE-BD48-B02F-72FA683510B1}" type="datetimeFigureOut">
               <a:rPr lang="en-US" smtClean="0"/>
-              <a:t>8/13/26</a:t>
+              <a:t>9/3/26</a:t>
             </a:fld>
             <a:endParaRPr lang="en-US"/>
           </a:p>
@@ -2213,7 +2218,7 @@
     </p:spTree>
     <p:extLst>
       <p:ext uri="{BB962C8B-B14F-4D97-AF65-F5344CB8AC3E}">
-        <p14:creationId xmlns:p14="http://schemas.microsoft.com/office/powerpoint/2010/main" val="2716557766"/>
+        <p14:creationId xmlns:p14="http://schemas.microsoft.com/office/powerpoint/2010/main" val="2984966153"/>
       </p:ext>
     </p:extLst>
   </p:cSld>
@@ -2257,7 +2262,7 @@
           <a:p>
             <a:fld id="{A2725604-C4EE-BD48-B02F-72FA683510B1}" type="datetimeFigureOut">
               <a:rPr lang="en-US" smtClean="0"/>
-              <a:t>8/13/26</a:t>
+              <a:t>9/3/26</a:t>
             </a:fld>
             <a:endParaRPr lang="en-US"/>
           </a:p>
@@ -2308,7 +2313,7 @@
     </p:spTree>
     <p:extLst>
       <p:ext uri="{BB962C8B-B14F-4D97-AF65-F5344CB8AC3E}">
-        <p14:creationId xmlns:p14="http://schemas.microsoft.com/office/powerpoint/2010/main" val="4166488761"/>
+        <p14:creationId xmlns:p14="http://schemas.microsoft.com/office/powerpoint/2010/main" val="1631413882"/>
       </p:ext>
     </p:extLst>
   </p:cSld>
@@ -2347,15 +2352,15 @@
         </p:nvSpPr>
         <p:spPr>
           <a:xfrm>
-            <a:off x="283429" y="146262"/>
-            <a:ext cx="1327130" cy="511916"/>
+            <a:off x="283429" y="161502"/>
+            <a:ext cx="1327130" cy="565256"/>
           </a:xfrm>
         </p:spPr>
         <p:txBody>
           <a:bodyPr anchor="b"/>
           <a:lstStyle>
             <a:lvl1pPr>
-              <a:defRPr sz="1024"/>
+              <a:defRPr sz="1080"/>
             </a:lvl1pPr>
           </a:lstStyle>
           <a:p>
@@ -2379,39 +2384,39 @@
         </p:nvSpPr>
         <p:spPr>
           <a:xfrm>
-            <a:off x="1749326" y="315885"/>
-            <a:ext cx="2083118" cy="1559109"/>
+            <a:off x="1749326" y="348799"/>
+            <a:ext cx="2083118" cy="1721563"/>
           </a:xfrm>
         </p:spPr>
         <p:txBody>
           <a:bodyPr/>
           <a:lstStyle>
             <a:lvl1pPr>
-              <a:defRPr sz="1024"/>
+              <a:defRPr sz="1080"/>
             </a:lvl1pPr>
             <a:lvl2pPr>
-              <a:defRPr sz="896"/>
+              <a:defRPr sz="945"/>
             </a:lvl2pPr>
             <a:lvl3pPr>
-              <a:defRPr sz="768"/>
+              <a:defRPr sz="810"/>
             </a:lvl3pPr>
             <a:lvl4pPr>
-              <a:defRPr sz="640"/>
+              <a:defRPr sz="675"/>
             </a:lvl4pPr>
             <a:lvl5pPr>
-              <a:defRPr sz="640"/>
+              <a:defRPr sz="675"/>
             </a:lvl5pPr>
             <a:lvl6pPr>
-              <a:defRPr sz="640"/>
+              <a:defRPr sz="675"/>
             </a:lvl6pPr>
             <a:lvl7pPr>
-              <a:defRPr sz="640"/>
+              <a:defRPr sz="675"/>
             </a:lvl7pPr>
             <a:lvl8pPr>
-              <a:defRPr sz="640"/>
+              <a:defRPr sz="675"/>
             </a:lvl8pPr>
             <a:lvl9pPr>
-              <a:defRPr sz="640"/>
+              <a:defRPr sz="675"/>
             </a:lvl9pPr>
           </a:lstStyle>
           <a:p>
@@ -2464,8 +2469,8 @@
         </p:nvSpPr>
         <p:spPr>
           <a:xfrm>
-            <a:off x="283429" y="658178"/>
-            <a:ext cx="1327130" cy="1219355"/>
+            <a:off x="283429" y="726758"/>
+            <a:ext cx="1327130" cy="1346408"/>
           </a:xfrm>
         </p:spPr>
         <p:txBody>
@@ -2473,39 +2478,39 @@
           <a:lstStyle>
             <a:lvl1pPr marL="0" indent="0">
               <a:buNone/>
-              <a:defRPr sz="512"/>
+              <a:defRPr sz="540"/>
             </a:lvl1pPr>
-            <a:lvl2pPr marL="146258" indent="0">
-              <a:buNone/>
-              <a:defRPr sz="448"/>
+            <a:lvl2pPr marL="154305" indent="0">
+              <a:buNone/>
+              <a:defRPr sz="472"/>
             </a:lvl2pPr>
-            <a:lvl3pPr marL="292517" indent="0">
-              <a:buNone/>
-              <a:defRPr sz="384"/>
+            <a:lvl3pPr marL="308610" indent="0">
+              <a:buNone/>
+              <a:defRPr sz="405"/>
             </a:lvl3pPr>
-            <a:lvl4pPr marL="438775" indent="0">
-              <a:buNone/>
-              <a:defRPr sz="320"/>
+            <a:lvl4pPr marL="462915" indent="0">
+              <a:buNone/>
+              <a:defRPr sz="338"/>
             </a:lvl4pPr>
-            <a:lvl5pPr marL="585033" indent="0">
-              <a:buNone/>
-              <a:defRPr sz="320"/>
+            <a:lvl5pPr marL="617220" indent="0">
+              <a:buNone/>
+              <a:defRPr sz="338"/>
             </a:lvl5pPr>
-            <a:lvl6pPr marL="731291" indent="0">
-              <a:buNone/>
-              <a:defRPr sz="320"/>
+            <a:lvl6pPr marL="771525" indent="0">
+              <a:buNone/>
+              <a:defRPr sz="338"/>
             </a:lvl6pPr>
-            <a:lvl7pPr marL="877550" indent="0">
-              <a:buNone/>
-              <a:defRPr sz="320"/>
+            <a:lvl7pPr marL="925830" indent="0">
+              <a:buNone/>
+              <a:defRPr sz="338"/>
             </a:lvl7pPr>
-            <a:lvl8pPr marL="1023808" indent="0">
-              <a:buNone/>
-              <a:defRPr sz="320"/>
+            <a:lvl8pPr marL="1080135" indent="0">
+              <a:buNone/>
+              <a:defRPr sz="338"/>
             </a:lvl8pPr>
-            <a:lvl9pPr marL="1170066" indent="0">
-              <a:buNone/>
-              <a:defRPr sz="320"/>
+            <a:lvl9pPr marL="1234440" indent="0">
+              <a:buNone/>
+              <a:defRPr sz="338"/>
             </a:lvl9pPr>
           </a:lstStyle>
           <a:p>
@@ -2534,7 +2539,7 @@
           <a:p>
             <a:fld id="{A2725604-C4EE-BD48-B02F-72FA683510B1}" type="datetimeFigureOut">
               <a:rPr lang="en-US" smtClean="0"/>
-              <a:t>8/13/26</a:t>
+              <a:t>9/3/26</a:t>
             </a:fld>
             <a:endParaRPr lang="en-US"/>
           </a:p>
@@ -2585,7 +2590,7 @@
     </p:spTree>
     <p:extLst>
       <p:ext uri="{BB962C8B-B14F-4D97-AF65-F5344CB8AC3E}">
-        <p14:creationId xmlns:p14="http://schemas.microsoft.com/office/powerpoint/2010/main" val="1825994811"/>
+        <p14:creationId xmlns:p14="http://schemas.microsoft.com/office/powerpoint/2010/main" val="1773907143"/>
       </p:ext>
     </p:extLst>
   </p:cSld>
@@ -2624,15 +2629,15 @@
         </p:nvSpPr>
         <p:spPr>
           <a:xfrm>
-            <a:off x="283429" y="146262"/>
-            <a:ext cx="1327130" cy="511916"/>
+            <a:off x="283429" y="161502"/>
+            <a:ext cx="1327130" cy="565256"/>
           </a:xfrm>
         </p:spPr>
         <p:txBody>
           <a:bodyPr anchor="b"/>
           <a:lstStyle>
             <a:lvl1pPr>
-              <a:defRPr sz="1024"/>
+              <a:defRPr sz="1080"/>
             </a:lvl1pPr>
           </a:lstStyle>
           <a:p>
@@ -2656,8 +2661,8 @@
         </p:nvSpPr>
         <p:spPr>
           <a:xfrm>
-            <a:off x="1749326" y="315885"/>
-            <a:ext cx="2083118" cy="1559109"/>
+            <a:off x="1749326" y="348799"/>
+            <a:ext cx="2083118" cy="1721563"/>
           </a:xfrm>
         </p:spPr>
         <p:txBody>
@@ -2665,39 +2670,39 @@
           <a:lstStyle>
             <a:lvl1pPr marL="0" indent="0">
               <a:buNone/>
-              <a:defRPr sz="1024"/>
+              <a:defRPr sz="1080"/>
             </a:lvl1pPr>
-            <a:lvl2pPr marL="146258" indent="0">
-              <a:buNone/>
-              <a:defRPr sz="896"/>
+            <a:lvl2pPr marL="154305" indent="0">
+              <a:buNone/>
+              <a:defRPr sz="945"/>
             </a:lvl2pPr>
-            <a:lvl3pPr marL="292517" indent="0">
-              <a:buNone/>
-              <a:defRPr sz="768"/>
+            <a:lvl3pPr marL="308610" indent="0">
+              <a:buNone/>
+              <a:defRPr sz="810"/>
             </a:lvl3pPr>
-            <a:lvl4pPr marL="438775" indent="0">
-              <a:buNone/>
-              <a:defRPr sz="640"/>
+            <a:lvl4pPr marL="462915" indent="0">
+              <a:buNone/>
+              <a:defRPr sz="675"/>
             </a:lvl4pPr>
-            <a:lvl5pPr marL="585033" indent="0">
-              <a:buNone/>
-              <a:defRPr sz="640"/>
+            <a:lvl5pPr marL="617220" indent="0">
+              <a:buNone/>
+              <a:defRPr sz="675"/>
             </a:lvl5pPr>
-            <a:lvl6pPr marL="731291" indent="0">
-              <a:buNone/>
-              <a:defRPr sz="640"/>
+            <a:lvl6pPr marL="771525" indent="0">
+              <a:buNone/>
+              <a:defRPr sz="675"/>
             </a:lvl6pPr>
-            <a:lvl7pPr marL="877550" indent="0">
-              <a:buNone/>
-              <a:defRPr sz="640"/>
+            <a:lvl7pPr marL="925830" indent="0">
+              <a:buNone/>
+              <a:defRPr sz="675"/>
             </a:lvl7pPr>
-            <a:lvl8pPr marL="1023808" indent="0">
-              <a:buNone/>
-              <a:defRPr sz="640"/>
+            <a:lvl8pPr marL="1080135" indent="0">
+              <a:buNone/>
+              <a:defRPr sz="675"/>
             </a:lvl8pPr>
-            <a:lvl9pPr marL="1170066" indent="0">
-              <a:buNone/>
-              <a:defRPr sz="640"/>
+            <a:lvl9pPr marL="1234440" indent="0">
+              <a:buNone/>
+              <a:defRPr sz="675"/>
             </a:lvl9pPr>
           </a:lstStyle>
           <a:p>
@@ -2721,8 +2726,8 @@
         </p:nvSpPr>
         <p:spPr>
           <a:xfrm>
-            <a:off x="283429" y="658178"/>
-            <a:ext cx="1327130" cy="1219355"/>
+            <a:off x="283429" y="726758"/>
+            <a:ext cx="1327130" cy="1346408"/>
           </a:xfrm>
         </p:spPr>
         <p:txBody>
@@ -2730,39 +2735,39 @@
           <a:lstStyle>
             <a:lvl1pPr marL="0" indent="0">
               <a:buNone/>
-              <a:defRPr sz="512"/>
+              <a:defRPr sz="540"/>
             </a:lvl1pPr>
-            <a:lvl2pPr marL="146258" indent="0">
-              <a:buNone/>
-              <a:defRPr sz="448"/>
+            <a:lvl2pPr marL="154305" indent="0">
+              <a:buNone/>
+              <a:defRPr sz="472"/>
             </a:lvl2pPr>
-            <a:lvl3pPr marL="292517" indent="0">
-              <a:buNone/>
-              <a:defRPr sz="384"/>
+            <a:lvl3pPr marL="308610" indent="0">
+              <a:buNone/>
+              <a:defRPr sz="405"/>
             </a:lvl3pPr>
-            <a:lvl4pPr marL="438775" indent="0">
-              <a:buNone/>
-              <a:defRPr sz="320"/>
+            <a:lvl4pPr marL="462915" indent="0">
+              <a:buNone/>
+              <a:defRPr sz="338"/>
             </a:lvl4pPr>
-            <a:lvl5pPr marL="585033" indent="0">
-              <a:buNone/>
-              <a:defRPr sz="320"/>
+            <a:lvl5pPr marL="617220" indent="0">
+              <a:buNone/>
+              <a:defRPr sz="338"/>
             </a:lvl5pPr>
-            <a:lvl6pPr marL="731291" indent="0">
-              <a:buNone/>
-              <a:defRPr sz="320"/>
+            <a:lvl6pPr marL="771525" indent="0">
+              <a:buNone/>
+              <a:defRPr sz="338"/>
             </a:lvl6pPr>
-            <a:lvl7pPr marL="877550" indent="0">
-              <a:buNone/>
-              <a:defRPr sz="320"/>
+            <a:lvl7pPr marL="925830" indent="0">
+              <a:buNone/>
+              <a:defRPr sz="338"/>
             </a:lvl7pPr>
-            <a:lvl8pPr marL="1023808" indent="0">
-              <a:buNone/>
-              <a:defRPr sz="320"/>
+            <a:lvl8pPr marL="1080135" indent="0">
+              <a:buNone/>
+              <a:defRPr sz="338"/>
             </a:lvl8pPr>
-            <a:lvl9pPr marL="1170066" indent="0">
-              <a:buNone/>
-              <a:defRPr sz="320"/>
+            <a:lvl9pPr marL="1234440" indent="0">
+              <a:buNone/>
+              <a:defRPr sz="338"/>
             </a:lvl9pPr>
           </a:lstStyle>
           <a:p>
@@ -2791,7 +2796,7 @@
           <a:p>
             <a:fld id="{A2725604-C4EE-BD48-B02F-72FA683510B1}" type="datetimeFigureOut">
               <a:rPr lang="en-US" smtClean="0"/>
-              <a:t>8/13/26</a:t>
+              <a:t>9/3/26</a:t>
             </a:fld>
             <a:endParaRPr lang="en-US"/>
           </a:p>
@@ -2842,7 +2847,7 @@
     </p:spTree>
     <p:extLst>
       <p:ext uri="{BB962C8B-B14F-4D97-AF65-F5344CB8AC3E}">
-        <p14:creationId xmlns:p14="http://schemas.microsoft.com/office/powerpoint/2010/main" val="1815964600"/>
+        <p14:creationId xmlns:p14="http://schemas.microsoft.com/office/powerpoint/2010/main" val="2309444210"/>
       </p:ext>
     </p:extLst>
   </p:cSld>
@@ -2886,8 +2891,8 @@
         </p:nvSpPr>
         <p:spPr>
           <a:xfrm>
-            <a:off x="282893" y="116807"/>
-            <a:ext cx="3549015" cy="424057"/>
+            <a:off x="282893" y="128977"/>
+            <a:ext cx="3549015" cy="468243"/>
           </a:xfrm>
           <a:prstGeom prst="rect">
             <a:avLst/>
@@ -2919,8 +2924,8 @@
         </p:nvSpPr>
         <p:spPr>
           <a:xfrm>
-            <a:off x="282893" y="584031"/>
-            <a:ext cx="3549015" cy="1392025"/>
+            <a:off x="282893" y="644885"/>
+            <a:ext cx="3549015" cy="1537070"/>
           </a:xfrm>
           <a:prstGeom prst="rect">
             <a:avLst/>
@@ -2981,8 +2986,8 @@
         </p:nvSpPr>
         <p:spPr>
           <a:xfrm>
-            <a:off x="282893" y="2033444"/>
-            <a:ext cx="925830" cy="116806"/>
+            <a:off x="282893" y="2245322"/>
+            <a:ext cx="925830" cy="128977"/>
           </a:xfrm>
           <a:prstGeom prst="rect">
             <a:avLst/>
@@ -2992,7 +2997,7 @@
           <a:bodyPr vert="horz" lIns="91440" tIns="45720" rIns="91440" bIns="45720" rtlCol="0" anchor="ctr"/>
           <a:lstStyle>
             <a:lvl1pPr algn="l">
-              <a:defRPr sz="384">
+              <a:defRPr sz="405">
                 <a:solidFill>
                   <a:schemeClr val="tx1">
                     <a:tint val="82000"/>
@@ -3004,7 +3009,7 @@
           <a:p>
             <a:fld id="{A2725604-C4EE-BD48-B02F-72FA683510B1}" type="datetimeFigureOut">
               <a:rPr lang="en-US" smtClean="0"/>
-              <a:t>8/13/26</a:t>
+              <a:t>9/3/26</a:t>
             </a:fld>
             <a:endParaRPr lang="en-US"/>
           </a:p>
@@ -3022,8 +3027,8 @@
         </p:nvSpPr>
         <p:spPr>
           <a:xfrm>
-            <a:off x="1363028" y="2033444"/>
-            <a:ext cx="1388745" cy="116806"/>
+            <a:off x="1363028" y="2245322"/>
+            <a:ext cx="1388745" cy="128977"/>
           </a:xfrm>
           <a:prstGeom prst="rect">
             <a:avLst/>
@@ -3033,7 +3038,7 @@
           <a:bodyPr vert="horz" lIns="91440" tIns="45720" rIns="91440" bIns="45720" rtlCol="0" anchor="ctr"/>
           <a:lstStyle>
             <a:lvl1pPr algn="ctr">
-              <a:defRPr sz="384">
+              <a:defRPr sz="405">
                 <a:solidFill>
                   <a:schemeClr val="tx1">
                     <a:tint val="82000"/>
@@ -3059,8 +3064,8 @@
         </p:nvSpPr>
         <p:spPr>
           <a:xfrm>
-            <a:off x="2906078" y="2033444"/>
-            <a:ext cx="925830" cy="116806"/>
+            <a:off x="2906078" y="2245322"/>
+            <a:ext cx="925830" cy="128977"/>
           </a:xfrm>
           <a:prstGeom prst="rect">
             <a:avLst/>
@@ -3070,7 +3075,7 @@
           <a:bodyPr vert="horz" lIns="91440" tIns="45720" rIns="91440" bIns="45720" rtlCol="0" anchor="ctr"/>
           <a:lstStyle>
             <a:lvl1pPr algn="r">
-              <a:defRPr sz="384">
+              <a:defRPr sz="405">
                 <a:solidFill>
                   <a:schemeClr val="tx1">
                     <a:tint val="82000"/>
@@ -3091,27 +3096,27 @@
     </p:spTree>
     <p:extLst>
       <p:ext uri="{BB962C8B-B14F-4D97-AF65-F5344CB8AC3E}">
-        <p14:creationId xmlns:p14="http://schemas.microsoft.com/office/powerpoint/2010/main" val="3531989542"/>
+        <p14:creationId xmlns:p14="http://schemas.microsoft.com/office/powerpoint/2010/main" val="69767911"/>
       </p:ext>
     </p:extLst>
   </p:cSld>
   <p:clrMap bg1="lt1" tx1="dk1" bg2="lt2" tx2="dk2" accent1="accent1" accent2="accent2" accent3="accent3" accent4="accent4" accent5="accent5" accent6="accent6" hlink="hlink" folHlink="folHlink"/>
   <p:sldLayoutIdLst>
-    <p:sldLayoutId id="2147483685" r:id="rId1"/>
-    <p:sldLayoutId id="2147483686" r:id="rId2"/>
-    <p:sldLayoutId id="2147483687" r:id="rId3"/>
-    <p:sldLayoutId id="2147483688" r:id="rId4"/>
-    <p:sldLayoutId id="2147483689" r:id="rId5"/>
-    <p:sldLayoutId id="2147483690" r:id="rId6"/>
-    <p:sldLayoutId id="2147483691" r:id="rId7"/>
-    <p:sldLayoutId id="2147483692" r:id="rId8"/>
-    <p:sldLayoutId id="2147483693" r:id="rId9"/>
-    <p:sldLayoutId id="2147483694" r:id="rId10"/>
-    <p:sldLayoutId id="2147483695" r:id="rId11"/>
+    <p:sldLayoutId id="2147483697" r:id="rId1"/>
+    <p:sldLayoutId id="2147483698" r:id="rId2"/>
+    <p:sldLayoutId id="2147483699" r:id="rId3"/>
+    <p:sldLayoutId id="2147483700" r:id="rId4"/>
+    <p:sldLayoutId id="2147483701" r:id="rId5"/>
+    <p:sldLayoutId id="2147483702" r:id="rId6"/>
+    <p:sldLayoutId id="2147483703" r:id="rId7"/>
+    <p:sldLayoutId id="2147483704" r:id="rId8"/>
+    <p:sldLayoutId id="2147483705" r:id="rId9"/>
+    <p:sldLayoutId id="2147483706" r:id="rId10"/>
+    <p:sldLayoutId id="2147483707" r:id="rId11"/>
   </p:sldLayoutIdLst>
   <p:txStyles>
     <p:titleStyle>
-      <a:lvl1pPr algn="l" defTabSz="292517" rtl="0" eaLnBrk="1" latinLnBrk="0" hangingPunct="1">
+      <a:lvl1pPr algn="l" defTabSz="308610" rtl="0" eaLnBrk="1" latinLnBrk="0" hangingPunct="1">
         <a:lnSpc>
           <a:spcPct val="90000"/>
         </a:lnSpc>
@@ -3119,7 +3124,7 @@
           <a:spcPct val="0"/>
         </a:spcBef>
         <a:buNone/>
-        <a:defRPr sz="1408" kern="1200">
+        <a:defRPr sz="1485" kern="1200">
           <a:solidFill>
             <a:schemeClr val="tx1"/>
           </a:solidFill>
@@ -3130,16 +3135,16 @@
       </a:lvl1pPr>
     </p:titleStyle>
     <p:bodyStyle>
-      <a:lvl1pPr marL="73129" indent="-73129" algn="l" defTabSz="292517" rtl="0" eaLnBrk="1" latinLnBrk="0" hangingPunct="1">
+      <a:lvl1pPr marL="77153" indent="-77153" algn="l" defTabSz="308610" rtl="0" eaLnBrk="1" latinLnBrk="0" hangingPunct="1">
         <a:lnSpc>
           <a:spcPct val="90000"/>
         </a:lnSpc>
         <a:spcBef>
-          <a:spcPts val="320"/>
+          <a:spcPts val="338"/>
         </a:spcBef>
         <a:buFont typeface="Arial" panose="020B0604020202020204" pitchFamily="34" charset="0"/>
         <a:buChar char="•"/>
-        <a:defRPr sz="896" kern="1200">
+        <a:defRPr sz="945" kern="1200">
           <a:solidFill>
             <a:schemeClr val="tx1"/>
           </a:solidFill>
@@ -3148,16 +3153,16 @@
           <a:cs typeface="+mn-cs"/>
         </a:defRPr>
       </a:lvl1pPr>
-      <a:lvl2pPr marL="219387" indent="-73129" algn="l" defTabSz="292517" rtl="0" eaLnBrk="1" latinLnBrk="0" hangingPunct="1">
+      <a:lvl2pPr marL="231458" indent="-77153" algn="l" defTabSz="308610" rtl="0" eaLnBrk="1" latinLnBrk="0" hangingPunct="1">
         <a:lnSpc>
           <a:spcPct val="90000"/>
         </a:lnSpc>
         <a:spcBef>
-          <a:spcPts val="160"/>
+          <a:spcPts val="169"/>
         </a:spcBef>
         <a:buFont typeface="Arial" panose="020B0604020202020204" pitchFamily="34" charset="0"/>
         <a:buChar char="•"/>
-        <a:defRPr sz="768" kern="1200">
+        <a:defRPr sz="810" kern="1200">
           <a:solidFill>
             <a:schemeClr val="tx1"/>
           </a:solidFill>
@@ -3166,16 +3171,16 @@
           <a:cs typeface="+mn-cs"/>
         </a:defRPr>
       </a:lvl2pPr>
-      <a:lvl3pPr marL="365646" indent="-73129" algn="l" defTabSz="292517" rtl="0" eaLnBrk="1" latinLnBrk="0" hangingPunct="1">
+      <a:lvl3pPr marL="385763" indent="-77153" algn="l" defTabSz="308610" rtl="0" eaLnBrk="1" latinLnBrk="0" hangingPunct="1">
         <a:lnSpc>
           <a:spcPct val="90000"/>
         </a:lnSpc>
         <a:spcBef>
-          <a:spcPts val="160"/>
+          <a:spcPts val="169"/>
         </a:spcBef>
         <a:buFont typeface="Arial" panose="020B0604020202020204" pitchFamily="34" charset="0"/>
         <a:buChar char="•"/>
-        <a:defRPr sz="640" kern="1200">
+        <a:defRPr sz="675" kern="1200">
           <a:solidFill>
             <a:schemeClr val="tx1"/>
           </a:solidFill>
@@ -3184,16 +3189,16 @@
           <a:cs typeface="+mn-cs"/>
         </a:defRPr>
       </a:lvl3pPr>
-      <a:lvl4pPr marL="511904" indent="-73129" algn="l" defTabSz="292517" rtl="0" eaLnBrk="1" latinLnBrk="0" hangingPunct="1">
+      <a:lvl4pPr marL="540068" indent="-77153" algn="l" defTabSz="308610" rtl="0" eaLnBrk="1" latinLnBrk="0" hangingPunct="1">
         <a:lnSpc>
           <a:spcPct val="90000"/>
         </a:lnSpc>
         <a:spcBef>
-          <a:spcPts val="160"/>
+          <a:spcPts val="169"/>
         </a:spcBef>
         <a:buFont typeface="Arial" panose="020B0604020202020204" pitchFamily="34" charset="0"/>
         <a:buChar char="•"/>
-        <a:defRPr sz="576" kern="1200">
+        <a:defRPr sz="608" kern="1200">
           <a:solidFill>
             <a:schemeClr val="tx1"/>
           </a:solidFill>
@@ -3202,16 +3207,16 @@
           <a:cs typeface="+mn-cs"/>
         </a:defRPr>
       </a:lvl4pPr>
-      <a:lvl5pPr marL="658162" indent="-73129" algn="l" defTabSz="292517" rtl="0" eaLnBrk="1" latinLnBrk="0" hangingPunct="1">
+      <a:lvl5pPr marL="694373" indent="-77153" algn="l" defTabSz="308610" rtl="0" eaLnBrk="1" latinLnBrk="0" hangingPunct="1">
         <a:lnSpc>
           <a:spcPct val="90000"/>
         </a:lnSpc>
         <a:spcBef>
-          <a:spcPts val="160"/>
+          <a:spcPts val="169"/>
         </a:spcBef>
         <a:buFont typeface="Arial" panose="020B0604020202020204" pitchFamily="34" charset="0"/>
         <a:buChar char="•"/>
-        <a:defRPr sz="576" kern="1200">
+        <a:defRPr sz="608" kern="1200">
           <a:solidFill>
             <a:schemeClr val="tx1"/>
           </a:solidFill>
@@ -3220,16 +3225,16 @@
           <a:cs typeface="+mn-cs"/>
         </a:defRPr>
       </a:lvl5pPr>
-      <a:lvl6pPr marL="804421" indent="-73129" algn="l" defTabSz="292517" rtl="0" eaLnBrk="1" latinLnBrk="0" hangingPunct="1">
+      <a:lvl6pPr marL="848678" indent="-77153" algn="l" defTabSz="308610" rtl="0" eaLnBrk="1" latinLnBrk="0" hangingPunct="1">
         <a:lnSpc>
           <a:spcPct val="90000"/>
         </a:lnSpc>
         <a:spcBef>
-          <a:spcPts val="160"/>
+          <a:spcPts val="169"/>
         </a:spcBef>
         <a:buFont typeface="Arial" panose="020B0604020202020204" pitchFamily="34" charset="0"/>
         <a:buChar char="•"/>
-        <a:defRPr sz="576" kern="1200">
+        <a:defRPr sz="608" kern="1200">
           <a:solidFill>
             <a:schemeClr val="tx1"/>
           </a:solidFill>
@@ -3238,16 +3243,16 @@
           <a:cs typeface="+mn-cs"/>
         </a:defRPr>
       </a:lvl6pPr>
-      <a:lvl7pPr marL="950679" indent="-73129" algn="l" defTabSz="292517" rtl="0" eaLnBrk="1" latinLnBrk="0" hangingPunct="1">
+      <a:lvl7pPr marL="1002983" indent="-77153" algn="l" defTabSz="308610" rtl="0" eaLnBrk="1" latinLnBrk="0" hangingPunct="1">
         <a:lnSpc>
           <a:spcPct val="90000"/>
         </a:lnSpc>
         <a:spcBef>
-          <a:spcPts val="160"/>
+          <a:spcPts val="169"/>
         </a:spcBef>
         <a:buFont typeface="Arial" panose="020B0604020202020204" pitchFamily="34" charset="0"/>
         <a:buChar char="•"/>
-        <a:defRPr sz="576" kern="1200">
+        <a:defRPr sz="608" kern="1200">
           <a:solidFill>
             <a:schemeClr val="tx1"/>
           </a:solidFill>
@@ -3256,16 +3261,16 @@
           <a:cs typeface="+mn-cs"/>
         </a:defRPr>
       </a:lvl7pPr>
-      <a:lvl8pPr marL="1096937" indent="-73129" algn="l" defTabSz="292517" rtl="0" eaLnBrk="1" latinLnBrk="0" hangingPunct="1">
+      <a:lvl8pPr marL="1157288" indent="-77153" algn="l" defTabSz="308610" rtl="0" eaLnBrk="1" latinLnBrk="0" hangingPunct="1">
         <a:lnSpc>
           <a:spcPct val="90000"/>
         </a:lnSpc>
         <a:spcBef>
-          <a:spcPts val="160"/>
+          <a:spcPts val="169"/>
         </a:spcBef>
         <a:buFont typeface="Arial" panose="020B0604020202020204" pitchFamily="34" charset="0"/>
         <a:buChar char="•"/>
-        <a:defRPr sz="576" kern="1200">
+        <a:defRPr sz="608" kern="1200">
           <a:solidFill>
             <a:schemeClr val="tx1"/>
           </a:solidFill>
@@ -3274,16 +3279,16 @@
           <a:cs typeface="+mn-cs"/>
         </a:defRPr>
       </a:lvl8pPr>
-      <a:lvl9pPr marL="1243195" indent="-73129" algn="l" defTabSz="292517" rtl="0" eaLnBrk="1" latinLnBrk="0" hangingPunct="1">
+      <a:lvl9pPr marL="1311593" indent="-77153" algn="l" defTabSz="308610" rtl="0" eaLnBrk="1" latinLnBrk="0" hangingPunct="1">
         <a:lnSpc>
           <a:spcPct val="90000"/>
         </a:lnSpc>
         <a:spcBef>
-          <a:spcPts val="160"/>
+          <a:spcPts val="169"/>
         </a:spcBef>
         <a:buFont typeface="Arial" panose="020B0604020202020204" pitchFamily="34" charset="0"/>
         <a:buChar char="•"/>
-        <a:defRPr sz="576" kern="1200">
+        <a:defRPr sz="608" kern="1200">
           <a:solidFill>
             <a:schemeClr val="tx1"/>
           </a:solidFill>
@@ -3297,8 +3302,8 @@
       <a:defPPr>
         <a:defRPr lang="en-US"/>
       </a:defPPr>
-      <a:lvl1pPr marL="0" algn="l" defTabSz="292517" rtl="0" eaLnBrk="1" latinLnBrk="0" hangingPunct="1">
-        <a:defRPr sz="576" kern="1200">
+      <a:lvl1pPr marL="0" algn="l" defTabSz="308610" rtl="0" eaLnBrk="1" latinLnBrk="0" hangingPunct="1">
+        <a:defRPr sz="608" kern="1200">
           <a:solidFill>
             <a:schemeClr val="tx1"/>
           </a:solidFill>
@@ -3307,8 +3312,8 @@
           <a:cs typeface="+mn-cs"/>
         </a:defRPr>
       </a:lvl1pPr>
-      <a:lvl2pPr marL="146258" algn="l" defTabSz="292517" rtl="0" eaLnBrk="1" latinLnBrk="0" hangingPunct="1">
-        <a:defRPr sz="576" kern="1200">
+      <a:lvl2pPr marL="154305" algn="l" defTabSz="308610" rtl="0" eaLnBrk="1" latinLnBrk="0" hangingPunct="1">
+        <a:defRPr sz="608" kern="1200">
           <a:solidFill>
             <a:schemeClr val="tx1"/>
           </a:solidFill>
@@ -3317,8 +3322,8 @@
           <a:cs typeface="+mn-cs"/>
         </a:defRPr>
       </a:lvl2pPr>
-      <a:lvl3pPr marL="292517" algn="l" defTabSz="292517" rtl="0" eaLnBrk="1" latinLnBrk="0" hangingPunct="1">
-        <a:defRPr sz="576" kern="1200">
+      <a:lvl3pPr marL="308610" algn="l" defTabSz="308610" rtl="0" eaLnBrk="1" latinLnBrk="0" hangingPunct="1">
+        <a:defRPr sz="608" kern="1200">
           <a:solidFill>
             <a:schemeClr val="tx1"/>
           </a:solidFill>
@@ -3327,8 +3332,8 @@
           <a:cs typeface="+mn-cs"/>
         </a:defRPr>
       </a:lvl3pPr>
-      <a:lvl4pPr marL="438775" algn="l" defTabSz="292517" rtl="0" eaLnBrk="1" latinLnBrk="0" hangingPunct="1">
-        <a:defRPr sz="576" kern="1200">
+      <a:lvl4pPr marL="462915" algn="l" defTabSz="308610" rtl="0" eaLnBrk="1" latinLnBrk="0" hangingPunct="1">
+        <a:defRPr sz="608" kern="1200">
           <a:solidFill>
             <a:schemeClr val="tx1"/>
           </a:solidFill>
@@ -3337,8 +3342,8 @@
           <a:cs typeface="+mn-cs"/>
         </a:defRPr>
       </a:lvl4pPr>
-      <a:lvl5pPr marL="585033" algn="l" defTabSz="292517" rtl="0" eaLnBrk="1" latinLnBrk="0" hangingPunct="1">
-        <a:defRPr sz="576" kern="1200">
+      <a:lvl5pPr marL="617220" algn="l" defTabSz="308610" rtl="0" eaLnBrk="1" latinLnBrk="0" hangingPunct="1">
+        <a:defRPr sz="608" kern="1200">
           <a:solidFill>
             <a:schemeClr val="tx1"/>
           </a:solidFill>
@@ -3347,8 +3352,8 @@
           <a:cs typeface="+mn-cs"/>
         </a:defRPr>
       </a:lvl5pPr>
-      <a:lvl6pPr marL="731291" algn="l" defTabSz="292517" rtl="0" eaLnBrk="1" latinLnBrk="0" hangingPunct="1">
-        <a:defRPr sz="576" kern="1200">
+      <a:lvl6pPr marL="771525" algn="l" defTabSz="308610" rtl="0" eaLnBrk="1" latinLnBrk="0" hangingPunct="1">
+        <a:defRPr sz="608" kern="1200">
           <a:solidFill>
             <a:schemeClr val="tx1"/>
           </a:solidFill>
@@ -3357,8 +3362,8 @@
           <a:cs typeface="+mn-cs"/>
         </a:defRPr>
       </a:lvl6pPr>
-      <a:lvl7pPr marL="877550" algn="l" defTabSz="292517" rtl="0" eaLnBrk="1" latinLnBrk="0" hangingPunct="1">
-        <a:defRPr sz="576" kern="1200">
+      <a:lvl7pPr marL="925830" algn="l" defTabSz="308610" rtl="0" eaLnBrk="1" latinLnBrk="0" hangingPunct="1">
+        <a:defRPr sz="608" kern="1200">
           <a:solidFill>
             <a:schemeClr val="tx1"/>
           </a:solidFill>
@@ -3367,8 +3372,8 @@
           <a:cs typeface="+mn-cs"/>
         </a:defRPr>
       </a:lvl7pPr>
-      <a:lvl8pPr marL="1023808" algn="l" defTabSz="292517" rtl="0" eaLnBrk="1" latinLnBrk="0" hangingPunct="1">
-        <a:defRPr sz="576" kern="1200">
+      <a:lvl8pPr marL="1080135" algn="l" defTabSz="308610" rtl="0" eaLnBrk="1" latinLnBrk="0" hangingPunct="1">
+        <a:defRPr sz="608" kern="1200">
           <a:solidFill>
             <a:schemeClr val="tx1"/>
           </a:solidFill>
@@ -3377,8 +3382,8 @@
           <a:cs typeface="+mn-cs"/>
         </a:defRPr>
       </a:lvl8pPr>
-      <a:lvl9pPr marL="1170066" algn="l" defTabSz="292517" rtl="0" eaLnBrk="1" latinLnBrk="0" hangingPunct="1">
-        <a:defRPr sz="576" kern="1200">
+      <a:lvl9pPr marL="1234440" algn="l" defTabSz="308610" rtl="0" eaLnBrk="1" latinLnBrk="0" hangingPunct="1">
+        <a:defRPr sz="608" kern="1200">
           <a:solidFill>
             <a:schemeClr val="tx1"/>
           </a:solidFill>
@@ -3431,7 +3436,7 @@
         </p:blipFill>
         <p:spPr>
           <a:xfrm>
-            <a:off x="1369153" y="1112077"/>
+            <a:off x="1369153" y="1330009"/>
             <a:ext cx="1371600" cy="1092200"/>
           </a:xfrm>
           <a:prstGeom prst="rect">
@@ -3461,7 +3466,7 @@
         </p:blipFill>
         <p:spPr>
           <a:xfrm>
-            <a:off x="1369153" y="42055"/>
+            <a:off x="1369153" y="259987"/>
             <a:ext cx="1371600" cy="1092200"/>
           </a:xfrm>
           <a:prstGeom prst="rect">
@@ -3491,7 +3496,7 @@
         </p:blipFill>
         <p:spPr>
           <a:xfrm>
-            <a:off x="2740753" y="1108649"/>
+            <a:off x="2740753" y="1326581"/>
             <a:ext cx="1371600" cy="1092200"/>
           </a:xfrm>
           <a:prstGeom prst="rect">
@@ -3521,7 +3526,7 @@
         </p:blipFill>
         <p:spPr>
           <a:xfrm>
-            <a:off x="2740753" y="38627"/>
+            <a:off x="2740753" y="256559"/>
             <a:ext cx="1371600" cy="1092200"/>
           </a:xfrm>
           <a:prstGeom prst="rect">
@@ -3543,7 +3548,7 @@
         </p:nvSpPr>
         <p:spPr>
           <a:xfrm>
-            <a:off x="1028831" y="783359"/>
+            <a:off x="1028831" y="1001292"/>
             <a:ext cx="799540" cy="655741"/>
           </a:xfrm>
           <a:prstGeom prst="rect">
@@ -3605,7 +3610,7 @@
         </p:blipFill>
         <p:spPr>
           <a:xfrm>
-            <a:off x="-1775" y="1108649"/>
+            <a:off x="-1775" y="1326581"/>
             <a:ext cx="1371600" cy="1092200"/>
           </a:xfrm>
           <a:prstGeom prst="rect">
@@ -3635,7 +3640,7 @@
         </p:blipFill>
         <p:spPr>
           <a:xfrm>
-            <a:off x="-1775" y="38627"/>
+            <a:off x="-1775" y="256559"/>
             <a:ext cx="1371600" cy="1092200"/>
           </a:xfrm>
           <a:prstGeom prst="rect">
@@ -3657,7 +3662,7 @@
         </p:nvSpPr>
         <p:spPr>
           <a:xfrm>
-            <a:off x="799757" y="959973"/>
+            <a:off x="799757" y="1177906"/>
             <a:ext cx="150682" cy="92333"/>
           </a:xfrm>
           <a:prstGeom prst="rect">
@@ -3697,7 +3702,7 @@
         </p:nvSpPr>
         <p:spPr>
           <a:xfrm>
-            <a:off x="2131525" y="959767"/>
+            <a:off x="2131525" y="1177700"/>
             <a:ext cx="150682" cy="92333"/>
           </a:xfrm>
           <a:prstGeom prst="rect">
@@ -3737,7 +3742,7 @@
         </p:nvSpPr>
         <p:spPr>
           <a:xfrm>
-            <a:off x="3502453" y="953211"/>
+            <a:off x="3502453" y="1171144"/>
             <a:ext cx="150682" cy="92333"/>
           </a:xfrm>
           <a:prstGeom prst="rect">
@@ -3777,7 +3782,7 @@
         </p:nvSpPr>
         <p:spPr>
           <a:xfrm>
-            <a:off x="799757" y="2030890"/>
+            <a:off x="799757" y="2248823"/>
             <a:ext cx="150682" cy="92333"/>
           </a:xfrm>
           <a:prstGeom prst="rect">
@@ -3817,7 +3822,7 @@
         </p:nvSpPr>
         <p:spPr>
           <a:xfrm>
-            <a:off x="2131525" y="2030890"/>
+            <a:off x="2131525" y="2248823"/>
             <a:ext cx="150682" cy="92333"/>
           </a:xfrm>
           <a:prstGeom prst="rect">
@@ -3857,7 +3862,7 @@
         </p:nvSpPr>
         <p:spPr>
           <a:xfrm>
-            <a:off x="3502453" y="2030890"/>
+            <a:off x="3502453" y="2248823"/>
             <a:ext cx="150682" cy="92333"/>
           </a:xfrm>
           <a:prstGeom prst="rect">
@@ -3897,7 +3902,7 @@
         </p:nvSpPr>
         <p:spPr>
           <a:xfrm>
-            <a:off x="554497" y="1389752"/>
+            <a:off x="554497" y="1607685"/>
             <a:ext cx="245260" cy="92333"/>
           </a:xfrm>
           <a:prstGeom prst="rect">
@@ -3958,7 +3963,7 @@
         </p:nvSpPr>
         <p:spPr>
           <a:xfrm>
-            <a:off x="1857318" y="1444074"/>
+            <a:off x="1857318" y="1662007"/>
             <a:ext cx="245260" cy="92333"/>
           </a:xfrm>
           <a:prstGeom prst="rect">
@@ -4019,7 +4024,7 @@
         </p:nvSpPr>
         <p:spPr>
           <a:xfrm>
-            <a:off x="2282207" y="1300601"/>
+            <a:off x="2282207" y="1518534"/>
             <a:ext cx="232436" cy="92333"/>
           </a:xfrm>
           <a:prstGeom prst="rect">
@@ -4080,7 +4085,7 @@
         </p:nvSpPr>
         <p:spPr>
           <a:xfrm>
-            <a:off x="1043578" y="1619673"/>
+            <a:off x="1043578" y="1837606"/>
             <a:ext cx="232436" cy="92333"/>
           </a:xfrm>
           <a:prstGeom prst="rect">
@@ -4141,7 +4146,7 @@
         </p:nvSpPr>
         <p:spPr>
           <a:xfrm>
-            <a:off x="3194589" y="1351741"/>
+            <a:off x="3194589" y="1569674"/>
             <a:ext cx="137858" cy="92333"/>
           </a:xfrm>
           <a:prstGeom prst="rect">
@@ -4202,7 +4207,7 @@
         </p:nvSpPr>
         <p:spPr>
           <a:xfrm>
-            <a:off x="1043578" y="248347"/>
+            <a:off x="1043578" y="466280"/>
             <a:ext cx="137858" cy="92333"/>
           </a:xfrm>
           <a:prstGeom prst="rect">
@@ -4263,7 +4268,7 @@
         </p:nvSpPr>
         <p:spPr>
           <a:xfrm>
-            <a:off x="1112507" y="573638"/>
+            <a:off x="1112507" y="791571"/>
             <a:ext cx="125034" cy="92333"/>
           </a:xfrm>
           <a:prstGeom prst="rect">
@@ -4324,7 +4329,7 @@
         </p:nvSpPr>
         <p:spPr>
           <a:xfrm>
-            <a:off x="3301519" y="1626249"/>
+            <a:off x="3301519" y="1844182"/>
             <a:ext cx="125034" cy="92333"/>
           </a:xfrm>
           <a:prstGeom prst="rect">
@@ -4385,7 +4390,7 @@
         </p:nvSpPr>
         <p:spPr>
           <a:xfrm>
-            <a:off x="2398425" y="256992"/>
+            <a:off x="2398425" y="474925"/>
             <a:ext cx="142668" cy="92333"/>
           </a:xfrm>
           <a:prstGeom prst="rect">
@@ -4446,7 +4451,7 @@
         </p:nvSpPr>
         <p:spPr>
           <a:xfrm>
-            <a:off x="3187216" y="208589"/>
+            <a:off x="3187216" y="426522"/>
             <a:ext cx="142668" cy="92333"/>
           </a:xfrm>
           <a:prstGeom prst="rect">
@@ -4507,7 +4512,7 @@
         </p:nvSpPr>
         <p:spPr>
           <a:xfrm>
-            <a:off x="3296709" y="561063"/>
+            <a:off x="3296709" y="778996"/>
             <a:ext cx="129844" cy="92333"/>
           </a:xfrm>
           <a:prstGeom prst="rect">
@@ -4568,7 +4573,7 @@
         </p:nvSpPr>
         <p:spPr>
           <a:xfrm>
-            <a:off x="2456941" y="556619"/>
+            <a:off x="2456941" y="774552"/>
             <a:ext cx="129844" cy="92333"/>
           </a:xfrm>
           <a:prstGeom prst="rect">
@@ -4629,7 +4634,7 @@
         </p:nvSpPr>
         <p:spPr>
           <a:xfrm>
-            <a:off x="-48396" y="4565"/>
+            <a:off x="-48396" y="222497"/>
             <a:ext cx="242374" cy="215444"/>
           </a:xfrm>
           <a:prstGeom prst="rect">
@@ -4668,7 +4673,7 @@
         </p:nvSpPr>
         <p:spPr>
           <a:xfrm>
-            <a:off x="-50800" y="1057167"/>
+            <a:off x="-50800" y="1275099"/>
             <a:ext cx="247184" cy="215444"/>
           </a:xfrm>
           <a:prstGeom prst="rect">
@@ -4707,7 +4712,7 @@
         </p:nvSpPr>
         <p:spPr>
           <a:xfrm>
-            <a:off x="1247967" y="6732"/>
+            <a:off x="1247968" y="224664"/>
             <a:ext cx="242375" cy="215444"/>
           </a:xfrm>
           <a:prstGeom prst="rect">
@@ -4746,7 +4751,7 @@
         </p:nvSpPr>
         <p:spPr>
           <a:xfrm>
-            <a:off x="1247966" y="1061856"/>
+            <a:off x="1247967" y="1279788"/>
             <a:ext cx="242375" cy="215444"/>
           </a:xfrm>
           <a:prstGeom prst="rect">
@@ -4785,7 +4790,7 @@
         </p:nvSpPr>
         <p:spPr>
           <a:xfrm>
-            <a:off x="2622773" y="0"/>
+            <a:off x="2622774" y="217932"/>
             <a:ext cx="242375" cy="215444"/>
           </a:xfrm>
           <a:prstGeom prst="rect">
@@ -4824,7 +4829,7 @@
         </p:nvSpPr>
         <p:spPr>
           <a:xfrm>
-            <a:off x="2622773" y="1061856"/>
+            <a:off x="2622774" y="1279788"/>
             <a:ext cx="242375" cy="215444"/>
           </a:xfrm>
           <a:prstGeom prst="rect">
@@ -4845,6 +4850,44 @@
                 <a:cs typeface="Arial" panose="020B0604020202020204" pitchFamily="34" charset="0"/>
               </a:rPr>
               <a:t>f</a:t>
+            </a:r>
+          </a:p>
+        </p:txBody>
+      </p:sp>
+      <p:sp>
+        <p:nvSpPr>
+          <p:cNvPr id="2" name="TextBox 1">
+            <a:extLst>
+              <a:ext uri="{FF2B5EF4-FFF2-40B4-BE49-F238E27FC236}">
+                <a16:creationId xmlns:a16="http://schemas.microsoft.com/office/drawing/2014/main" id="{2DB433CC-230E-FA3F-11A0-671EECB6CB5C}"/>
+              </a:ext>
+            </a:extLst>
+          </p:cNvPr>
+          <p:cNvSpPr txBox="1"/>
+          <p:nvPr/>
+        </p:nvSpPr>
+        <p:spPr>
+          <a:xfrm>
+            <a:off x="-70193" y="-48611"/>
+            <a:ext cx="747320" cy="276999"/>
+          </a:xfrm>
+          <a:prstGeom prst="rect">
+            <a:avLst/>
+          </a:prstGeom>
+          <a:noFill/>
+        </p:spPr>
+        <p:txBody>
+          <a:bodyPr wrap="none" rtlCol="0">
+            <a:spAutoFit/>
+          </a:bodyPr>
+          <a:lstStyle/>
+          <a:p>
+            <a:r>
+              <a:rPr lang="en-US" sz="1200" dirty="0">
+                <a:latin typeface="Arial" panose="020B0604020202020204" pitchFamily="34" charset="0"/>
+                <a:cs typeface="Arial" panose="020B0604020202020204" pitchFamily="34" charset="0"/>
+              </a:rPr>
+              <a:t>Figure 4</a:t>
             </a:r>
           </a:p>
         </p:txBody>
